--- a/Nagoya_Elevator_Map_Pamphlet_Final編集.pptx
+++ b/Nagoya_Elevator_Map_Pamphlet_Final編集.pptx
@@ -3098,7 +3098,7 @@
         </p:nvSpPr>
         <p:spPr>
           <a:xfrm>
-            <a:off x="334185" y="180000"/>
+            <a:off x="334185" y="323587"/>
             <a:ext cx="6891630" cy="830997"/>
           </a:xfrm>
           <a:prstGeom prst="rect">
@@ -3163,8 +3163,8 @@
         </p:nvSpPr>
         <p:spPr>
           <a:xfrm>
-            <a:off x="3144126" y="1775895"/>
-            <a:ext cx="4030332" cy="5421997"/>
+            <a:off x="3010776" y="2471538"/>
+            <a:ext cx="4030332" cy="5486117"/>
           </a:xfrm>
           <a:prstGeom prst="rect">
             <a:avLst/>
@@ -3177,40 +3177,7 @@
           </a:bodyPr>
           <a:lstStyle/>
           <a:p>
-            <a:pPr algn="just"/>
-            <a:endParaRPr dirty="0">
-              <a:latin typeface="BIZ UDPゴシック" panose="020B0400000000000000" pitchFamily="50" charset="-128"/>
-              <a:ea typeface="BIZ UDPゴシック" panose="020B0400000000000000" pitchFamily="50" charset="-128"/>
-            </a:endParaRPr>
-          </a:p>
-          <a:p>
-            <a:pPr algn="just">
-              <a:defRPr sz="2200" b="1"/>
-            </a:pPr>
-            <a:r>
-              <a:rPr dirty="0">
-                <a:latin typeface="BIZ UDPゴシック" panose="020B0400000000000000" pitchFamily="50" charset="-128"/>
-                <a:ea typeface="BIZ UDPゴシック" panose="020B0400000000000000" pitchFamily="50" charset="-128"/>
-              </a:rPr>
-              <a:t>【 </a:t>
-            </a:r>
-            <a:r>
-              <a:rPr dirty="0" err="1">
-                <a:latin typeface="BIZ UDPゴシック" panose="020B0400000000000000" pitchFamily="50" charset="-128"/>
-                <a:ea typeface="BIZ UDPゴシック" panose="020B0400000000000000" pitchFamily="50" charset="-128"/>
-              </a:rPr>
-              <a:t>詳しい使い方</a:t>
-            </a:r>
-            <a:r>
-              <a:rPr dirty="0">
-                <a:latin typeface="BIZ UDPゴシック" panose="020B0400000000000000" pitchFamily="50" charset="-128"/>
-                <a:ea typeface="BIZ UDPゴシック" panose="020B0400000000000000" pitchFamily="50" charset="-128"/>
-              </a:rPr>
-              <a:t> 】</a:t>
-            </a:r>
-          </a:p>
-          <a:p>
-            <a:pPr algn="just">
+            <a:pPr algn="ctr">
               <a:spcBef>
                 <a:spcPts val="1000"/>
               </a:spcBef>
@@ -3293,26 +3260,38 @@
             </a:endParaRPr>
           </a:p>
           <a:p>
+            <a:pPr algn="ctr">
+              <a:spcBef>
+                <a:spcPts val="1000"/>
+              </a:spcBef>
+              <a:defRPr sz="1600" b="1"/>
+            </a:pPr>
+            <a:r>
+              <a:rPr dirty="0">
+                <a:latin typeface="BIZ UDPゴシック" panose="020B0400000000000000" pitchFamily="50" charset="-128"/>
+                <a:ea typeface="BIZ UDPゴシック" panose="020B0400000000000000" pitchFamily="50" charset="-128"/>
+              </a:rPr>
+              <a:t>② </a:t>
+            </a:r>
+            <a:r>
+              <a:rPr dirty="0" err="1">
+                <a:latin typeface="BIZ UDPゴシック" panose="020B0400000000000000" pitchFamily="50" charset="-128"/>
+                <a:ea typeface="BIZ UDPゴシック" panose="020B0400000000000000" pitchFamily="50" charset="-128"/>
+              </a:rPr>
+              <a:t>エレベーター情報をチェック</a:t>
+            </a:r>
+            <a:endParaRPr lang="en-US" dirty="0">
+              <a:latin typeface="BIZ UDPゴシック" panose="020B0400000000000000" pitchFamily="50" charset="-128"/>
+              <a:ea typeface="BIZ UDPゴシック" panose="020B0400000000000000" pitchFamily="50" charset="-128"/>
+            </a:endParaRPr>
+          </a:p>
+          <a:p>
             <a:pPr algn="just">
               <a:spcBef>
                 <a:spcPts val="1000"/>
               </a:spcBef>
               <a:defRPr sz="1600" b="1"/>
             </a:pPr>
-            <a:r>
-              <a:rPr dirty="0">
-                <a:latin typeface="BIZ UDPゴシック" panose="020B0400000000000000" pitchFamily="50" charset="-128"/>
-                <a:ea typeface="BIZ UDPゴシック" panose="020B0400000000000000" pitchFamily="50" charset="-128"/>
-              </a:rPr>
-              <a:t>② </a:t>
-            </a:r>
-            <a:r>
-              <a:rPr dirty="0" err="1">
-                <a:latin typeface="BIZ UDPゴシック" panose="020B0400000000000000" pitchFamily="50" charset="-128"/>
-                <a:ea typeface="BIZ UDPゴシック" panose="020B0400000000000000" pitchFamily="50" charset="-128"/>
-              </a:rPr>
-              <a:t>エレベーター情報をチェック</a:t>
-            </a:r>
             <a:endParaRPr dirty="0">
               <a:latin typeface="BIZ UDPゴシック" panose="020B0400000000000000" pitchFamily="50" charset="-128"/>
               <a:ea typeface="BIZ UDPゴシック" panose="020B0400000000000000" pitchFamily="50" charset="-128"/>
@@ -3344,16 +3323,54 @@
                 <a:latin typeface="BIZ UDPゴシック" panose="020B0400000000000000" pitchFamily="50" charset="-128"/>
                 <a:ea typeface="BIZ UDPゴシック" panose="020B0400000000000000" pitchFamily="50" charset="-128"/>
               </a:rPr>
-              <a:t>駅名とエレベーターを確認し、「出発地・現在地からのルートを</a:t>
-            </a:r>
-            <a:r>
-              <a:rPr lang="ja-JP" altLang="en-US">
+              <a:t>駅名とエレベーターを確認し、「出発地・現在地からのルートを検索」ボタンか「ここから到着地へのルートを検索」をタップ！</a:t>
+            </a:r>
+            <a:endParaRPr lang="en-US" altLang="ja-JP" dirty="0">
+              <a:latin typeface="BIZ UDPゴシック" panose="020B0400000000000000" pitchFamily="50" charset="-128"/>
+              <a:ea typeface="BIZ UDPゴシック" panose="020B0400000000000000" pitchFamily="50" charset="-128"/>
+            </a:endParaRPr>
+          </a:p>
+          <a:p>
+            <a:pPr algn="just">
+              <a:spcAft>
+                <a:spcPts val="500"/>
+              </a:spcAft>
+              <a:defRPr sz="1200"/>
+            </a:pPr>
+            <a:r>
+              <a:rPr lang="ja-JP" altLang="en-US" dirty="0">
                 <a:latin typeface="BIZ UDPゴシック" panose="020B0400000000000000" pitchFamily="50" charset="-128"/>
                 <a:ea typeface="BIZ UDPゴシック" panose="020B0400000000000000" pitchFamily="50" charset="-128"/>
               </a:rPr>
-              <a:t>検索」ボタンか「ここから到着地へのルートを検索」をタップ！</a:t>
+              <a:t>また、絵パネルから次の電車までの時間も確認しましょう！</a:t>
             </a:r>
             <a:endParaRPr dirty="0">
+              <a:latin typeface="BIZ UDPゴシック" panose="020B0400000000000000" pitchFamily="50" charset="-128"/>
+              <a:ea typeface="BIZ UDPゴシック" panose="020B0400000000000000" pitchFamily="50" charset="-128"/>
+            </a:endParaRPr>
+          </a:p>
+          <a:p>
+            <a:pPr algn="ctr">
+              <a:spcBef>
+                <a:spcPts val="1000"/>
+              </a:spcBef>
+              <a:defRPr sz="1600" b="1"/>
+            </a:pPr>
+            <a:r>
+              <a:rPr dirty="0">
+                <a:latin typeface="BIZ UDPゴシック" panose="020B0400000000000000" pitchFamily="50" charset="-128"/>
+                <a:ea typeface="BIZ UDPゴシック" panose="020B0400000000000000" pitchFamily="50" charset="-128"/>
+              </a:rPr>
+              <a:t>③ </a:t>
+            </a:r>
+            <a:r>
+              <a:rPr dirty="0" err="1">
+                <a:latin typeface="BIZ UDPゴシック" panose="020B0400000000000000" pitchFamily="50" charset="-128"/>
+                <a:ea typeface="BIZ UDPゴシック" panose="020B0400000000000000" pitchFamily="50" charset="-128"/>
+              </a:rPr>
+              <a:t>バリアフリールートを検索</a:t>
+            </a:r>
+            <a:endParaRPr lang="en-US" dirty="0">
               <a:latin typeface="BIZ UDPゴシック" panose="020B0400000000000000" pitchFamily="50" charset="-128"/>
               <a:ea typeface="BIZ UDPゴシック" panose="020B0400000000000000" pitchFamily="50" charset="-128"/>
             </a:endParaRPr>
@@ -3365,20 +3382,6 @@
               </a:spcBef>
               <a:defRPr sz="1600" b="1"/>
             </a:pPr>
-            <a:r>
-              <a:rPr dirty="0">
-                <a:latin typeface="BIZ UDPゴシック" panose="020B0400000000000000" pitchFamily="50" charset="-128"/>
-                <a:ea typeface="BIZ UDPゴシック" panose="020B0400000000000000" pitchFamily="50" charset="-128"/>
-              </a:rPr>
-              <a:t>③ </a:t>
-            </a:r>
-            <a:r>
-              <a:rPr dirty="0" err="1">
-                <a:latin typeface="BIZ UDPゴシック" panose="020B0400000000000000" pitchFamily="50" charset="-128"/>
-                <a:ea typeface="BIZ UDPゴシック" panose="020B0400000000000000" pitchFamily="50" charset="-128"/>
-              </a:rPr>
-              <a:t>バリアフリールートを検索</a:t>
-            </a:r>
             <a:endParaRPr dirty="0">
               <a:latin typeface="BIZ UDPゴシック" panose="020B0400000000000000" pitchFamily="50" charset="-128"/>
               <a:ea typeface="BIZ UDPゴシック" panose="020B0400000000000000" pitchFamily="50" charset="-128"/>
@@ -3412,29 +3415,14 @@
               </a:rPr>
               <a:t>。</a:t>
             </a:r>
-          </a:p>
-          <a:p>
-            <a:pPr algn="just">
-              <a:spcBef>
-                <a:spcPts val="1000"/>
-              </a:spcBef>
-              <a:defRPr sz="1600" b="1"/>
-            </a:pPr>
-            <a:r>
-              <a:rPr dirty="0">
+            <a:r>
+              <a:rPr lang="ja-JP" altLang="en-US" dirty="0">
                 <a:latin typeface="BIZ UDPゴシック" panose="020B0400000000000000" pitchFamily="50" charset="-128"/>
                 <a:ea typeface="BIZ UDPゴシック" panose="020B0400000000000000" pitchFamily="50" charset="-128"/>
               </a:rPr>
-              <a:t>④ </a:t>
-            </a:r>
-            <a:r>
-              <a:rPr dirty="0" err="1">
-                <a:latin typeface="BIZ UDPゴシック" panose="020B0400000000000000" pitchFamily="50" charset="-128"/>
-                <a:ea typeface="BIZ UDPゴシック" panose="020B0400000000000000" pitchFamily="50" charset="-128"/>
-              </a:rPr>
-              <a:t>駅パネルで次発時刻を確認</a:t>
-            </a:r>
-            <a:endParaRPr dirty="0">
+              <a:t>また、道順とタクシーでの料金の概算を出してくれるので、どのようにいいくかを決めましょう！</a:t>
+            </a:r>
+            <a:endParaRPr lang="en-US" dirty="0">
               <a:latin typeface="BIZ UDPゴシック" panose="020B0400000000000000" pitchFamily="50" charset="-128"/>
               <a:ea typeface="BIZ UDPゴシック" panose="020B0400000000000000" pitchFamily="50" charset="-128"/>
             </a:endParaRPr>
@@ -3447,19 +3435,16 @@
               <a:defRPr sz="1200"/>
             </a:pPr>
             <a:r>
-              <a:rPr dirty="0" err="1">
+              <a:rPr lang="ja-JP" altLang="en-US" dirty="0">
                 <a:latin typeface="BIZ UDPゴシック" panose="020B0400000000000000" pitchFamily="50" charset="-128"/>
                 <a:ea typeface="BIZ UDPゴシック" panose="020B0400000000000000" pitchFamily="50" charset="-128"/>
               </a:rPr>
-              <a:t>駅名をタップすると表示されるパネルから、次に発車する列車の時刻をリアルタイムでチェック。待ち時間を最小限に</a:t>
-            </a:r>
-            <a:r>
-              <a:rPr dirty="0">
-                <a:latin typeface="BIZ UDPゴシック" panose="020B0400000000000000" pitchFamily="50" charset="-128"/>
-                <a:ea typeface="BIZ UDPゴシック" panose="020B0400000000000000" pitchFamily="50" charset="-128"/>
-              </a:rPr>
-              <a:t>。</a:t>
-            </a:r>
+              <a:t>タクシーを呼ぶ場合、タクシー会社のボタンをタップするとタクシー会社の電話することができます！</a:t>
+            </a:r>
+            <a:endParaRPr dirty="0">
+              <a:latin typeface="BIZ UDPゴシック" panose="020B0400000000000000" pitchFamily="50" charset="-128"/>
+              <a:ea typeface="BIZ UDPゴシック" panose="020B0400000000000000" pitchFamily="50" charset="-128"/>
+            </a:endParaRPr>
           </a:p>
         </p:txBody>
       </p:sp>
@@ -3479,8 +3464,8 @@
         </p:blipFill>
         <p:spPr>
           <a:xfrm>
-            <a:off x="5387892" y="8388226"/>
-            <a:ext cx="1980000" cy="1980000"/>
+            <a:off x="5013701" y="8318841"/>
+            <a:ext cx="2119617" cy="2119617"/>
           </a:xfrm>
           <a:prstGeom prst="rect">
             <a:avLst/>
@@ -3588,6 +3573,61 @@
               <a:latin typeface="BIZ UDPゴシック" panose="020B0400000000000000" pitchFamily="50" charset="-128"/>
               <a:ea typeface="BIZ UDPゴシック" panose="020B0400000000000000" pitchFamily="50" charset="-128"/>
             </a:endParaRPr>
+          </a:p>
+        </p:txBody>
+      </p:sp>
+      <p:sp>
+        <p:nvSpPr>
+          <p:cNvPr id="8" name="テキスト ボックス 7">
+            <a:extLst>
+              <a:ext uri="{FF2B5EF4-FFF2-40B4-BE49-F238E27FC236}">
+                <a16:creationId xmlns:a16="http://schemas.microsoft.com/office/drawing/2014/main" id="{D7406728-971B-46CC-98BD-C9B1743D4531}"/>
+              </a:ext>
+            </a:extLst>
+          </p:cNvPr>
+          <p:cNvSpPr txBox="1"/>
+          <p:nvPr/>
+        </p:nvSpPr>
+        <p:spPr>
+          <a:xfrm>
+            <a:off x="1795463" y="1341816"/>
+            <a:ext cx="3781424" cy="430887"/>
+          </a:xfrm>
+          <a:prstGeom prst="rect">
+            <a:avLst/>
+          </a:prstGeom>
+          <a:noFill/>
+        </p:spPr>
+        <p:txBody>
+          <a:bodyPr wrap="square">
+            <a:spAutoFit/>
+          </a:bodyPr>
+          <a:lstStyle/>
+          <a:p>
+            <a:pPr algn="ctr">
+              <a:defRPr sz="2200" b="1"/>
+            </a:pPr>
+            <a:r>
+              <a:rPr lang="en-US" altLang="ja-JP" dirty="0">
+                <a:latin typeface="BIZ UDPゴシック" panose="020B0400000000000000" pitchFamily="50" charset="-128"/>
+                <a:ea typeface="BIZ UDPゴシック" panose="020B0400000000000000" pitchFamily="50" charset="-128"/>
+              </a:rPr>
+              <a:t>【 </a:t>
+            </a:r>
+            <a:r>
+              <a:rPr lang="ja-JP" altLang="en-US" dirty="0">
+                <a:latin typeface="BIZ UDPゴシック" panose="020B0400000000000000" pitchFamily="50" charset="-128"/>
+                <a:ea typeface="BIZ UDPゴシック" panose="020B0400000000000000" pitchFamily="50" charset="-128"/>
+              </a:rPr>
+              <a:t>詳しい使い方 </a:t>
+            </a:r>
+            <a:r>
+              <a:rPr lang="en-US" altLang="ja-JP" dirty="0">
+                <a:latin typeface="BIZ UDPゴシック" panose="020B0400000000000000" pitchFamily="50" charset="-128"/>
+                <a:ea typeface="BIZ UDPゴシック" panose="020B0400000000000000" pitchFamily="50" charset="-128"/>
+              </a:rPr>
+              <a:t>】</a:t>
+            </a:r>
           </a:p>
         </p:txBody>
       </p:sp>

--- a/Nagoya_Elevator_Map_Pamphlet_Final編集.pptx
+++ b/Nagoya_Elevator_Map_Pamphlet_Final編集.pptx
@@ -302,7 +302,7 @@
           <a:p>
             <a:fld id="{5BCAD085-E8A6-8845-BD4E-CB4CCA059FC4}" type="datetimeFigureOut">
               <a:rPr lang="en-US" smtClean="0"/>
-              <a:t>3/23/2026</a:t>
+              <a:t>3/24/2026</a:t>
             </a:fld>
             <a:endParaRPr lang="en-US"/>
           </a:p>
@@ -470,7 +470,7 @@
           <a:p>
             <a:fld id="{5BCAD085-E8A6-8845-BD4E-CB4CCA059FC4}" type="datetimeFigureOut">
               <a:rPr lang="en-US" smtClean="0"/>
-              <a:t>3/23/2026</a:t>
+              <a:t>3/24/2026</a:t>
             </a:fld>
             <a:endParaRPr lang="en-US"/>
           </a:p>
@@ -648,7 +648,7 @@
           <a:p>
             <a:fld id="{5BCAD085-E8A6-8845-BD4E-CB4CCA059FC4}" type="datetimeFigureOut">
               <a:rPr lang="en-US" smtClean="0"/>
-              <a:t>3/23/2026</a:t>
+              <a:t>3/24/2026</a:t>
             </a:fld>
             <a:endParaRPr lang="en-US"/>
           </a:p>
@@ -816,7 +816,7 @@
           <a:p>
             <a:fld id="{5BCAD085-E8A6-8845-BD4E-CB4CCA059FC4}" type="datetimeFigureOut">
               <a:rPr lang="en-US" smtClean="0"/>
-              <a:t>3/23/2026</a:t>
+              <a:t>3/24/2026</a:t>
             </a:fld>
             <a:endParaRPr lang="en-US"/>
           </a:p>
@@ -1061,7 +1061,7 @@
           <a:p>
             <a:fld id="{5BCAD085-E8A6-8845-BD4E-CB4CCA059FC4}" type="datetimeFigureOut">
               <a:rPr lang="en-US" smtClean="0"/>
-              <a:t>3/23/2026</a:t>
+              <a:t>3/24/2026</a:t>
             </a:fld>
             <a:endParaRPr lang="en-US"/>
           </a:p>
@@ -1346,7 +1346,7 @@
           <a:p>
             <a:fld id="{5BCAD085-E8A6-8845-BD4E-CB4CCA059FC4}" type="datetimeFigureOut">
               <a:rPr lang="en-US" smtClean="0"/>
-              <a:t>3/23/2026</a:t>
+              <a:t>3/24/2026</a:t>
             </a:fld>
             <a:endParaRPr lang="en-US"/>
           </a:p>
@@ -1765,7 +1765,7 @@
           <a:p>
             <a:fld id="{5BCAD085-E8A6-8845-BD4E-CB4CCA059FC4}" type="datetimeFigureOut">
               <a:rPr lang="en-US" smtClean="0"/>
-              <a:t>3/23/2026</a:t>
+              <a:t>3/24/2026</a:t>
             </a:fld>
             <a:endParaRPr lang="en-US"/>
           </a:p>
@@ -1882,7 +1882,7 @@
           <a:p>
             <a:fld id="{5BCAD085-E8A6-8845-BD4E-CB4CCA059FC4}" type="datetimeFigureOut">
               <a:rPr lang="en-US" smtClean="0"/>
-              <a:t>3/23/2026</a:t>
+              <a:t>3/24/2026</a:t>
             </a:fld>
             <a:endParaRPr lang="en-US"/>
           </a:p>
@@ -1977,7 +1977,7 @@
           <a:p>
             <a:fld id="{5BCAD085-E8A6-8845-BD4E-CB4CCA059FC4}" type="datetimeFigureOut">
               <a:rPr lang="en-US" smtClean="0"/>
-              <a:t>3/23/2026</a:t>
+              <a:t>3/24/2026</a:t>
             </a:fld>
             <a:endParaRPr lang="en-US"/>
           </a:p>
@@ -2252,7 +2252,7 @@
           <a:p>
             <a:fld id="{5BCAD085-E8A6-8845-BD4E-CB4CCA059FC4}" type="datetimeFigureOut">
               <a:rPr lang="en-US" smtClean="0"/>
-              <a:t>3/23/2026</a:t>
+              <a:t>3/24/2026</a:t>
             </a:fld>
             <a:endParaRPr lang="en-US"/>
           </a:p>
@@ -2504,7 +2504,7 @@
           <a:p>
             <a:fld id="{5BCAD085-E8A6-8845-BD4E-CB4CCA059FC4}" type="datetimeFigureOut">
               <a:rPr lang="en-US" smtClean="0"/>
-              <a:t>3/23/2026</a:t>
+              <a:t>3/24/2026</a:t>
             </a:fld>
             <a:endParaRPr lang="en-US"/>
           </a:p>
@@ -2715,7 +2715,7 @@
           <a:p>
             <a:fld id="{5BCAD085-E8A6-8845-BD4E-CB4CCA059FC4}" type="datetimeFigureOut">
               <a:rPr lang="en-US" smtClean="0"/>
-              <a:t>3/23/2026</a:t>
+              <a:t>3/24/2026</a:t>
             </a:fld>
             <a:endParaRPr lang="en-US"/>
           </a:p>
@@ -3226,7 +3226,21 @@
                 <a:latin typeface="BIZ UDPゴシック" panose="020B0400000000000000" pitchFamily="50" charset="-128"/>
                 <a:ea typeface="BIZ UDPゴシック" panose="020B0400000000000000" pitchFamily="50" charset="-128"/>
               </a:rPr>
-              <a:t>画面上部の検索バーに目的地や駅名を入力。候補から選ぶだけで、地図がその場所にジャンプします</a:t>
+              <a:t>画面上部の検索バーに</a:t>
+            </a:r>
+            <a:r>
+              <a:rPr lang="ja-JP" altLang="en-US" dirty="0">
+                <a:latin typeface="BIZ UDPゴシック" panose="020B0400000000000000" pitchFamily="50" charset="-128"/>
+                <a:ea typeface="BIZ UDPゴシック" panose="020B0400000000000000" pitchFamily="50" charset="-128"/>
+              </a:rPr>
+              <a:t>出発地・</a:t>
+            </a:r>
+            <a:r>
+              <a:rPr dirty="0" err="1">
+                <a:latin typeface="BIZ UDPゴシック" panose="020B0400000000000000" pitchFamily="50" charset="-128"/>
+                <a:ea typeface="BIZ UDPゴシック" panose="020B0400000000000000" pitchFamily="50" charset="-128"/>
+              </a:rPr>
+              <a:t>目的地や駅名を入力。候補から選ぶだけで、地図がその場所にジャンプします</a:t>
             </a:r>
             <a:r>
               <a:rPr dirty="0">
@@ -3309,7 +3323,28 @@
                 <a:latin typeface="BIZ UDPゴシック" panose="020B0400000000000000" pitchFamily="50" charset="-128"/>
                 <a:ea typeface="BIZ UDPゴシック" panose="020B0400000000000000" pitchFamily="50" charset="-128"/>
               </a:rPr>
-              <a:t>地図上の「青いピン」をタップ</a:t>
+              <a:t>地図上の</a:t>
+            </a:r>
+            <a:r>
+              <a:rPr dirty="0">
+                <a:latin typeface="BIZ UDPゴシック" panose="020B0400000000000000" pitchFamily="50" charset="-128"/>
+                <a:ea typeface="BIZ UDPゴシック" panose="020B0400000000000000" pitchFamily="50" charset="-128"/>
+              </a:rPr>
+              <a:t>「</a:t>
+            </a:r>
+            <a:r>
+              <a:rPr lang="ja-JP" altLang="en-US" dirty="0">
+                <a:latin typeface="BIZ UDPゴシック" panose="020B0400000000000000" pitchFamily="50" charset="-128"/>
+                <a:ea typeface="BIZ UDPゴシック" panose="020B0400000000000000" pitchFamily="50" charset="-128"/>
+              </a:rPr>
+              <a:t>赤い</a:t>
+            </a:r>
+            <a:r>
+              <a:rPr dirty="0" err="1">
+                <a:latin typeface="BIZ UDPゴシック" panose="020B0400000000000000" pitchFamily="50" charset="-128"/>
+                <a:ea typeface="BIZ UDPゴシック" panose="020B0400000000000000" pitchFamily="50" charset="-128"/>
+              </a:rPr>
+              <a:t>ピン」をタップ</a:t>
             </a:r>
             <a:r>
               <a:rPr dirty="0">
@@ -3342,7 +3377,7 @@
                 <a:latin typeface="BIZ UDPゴシック" panose="020B0400000000000000" pitchFamily="50" charset="-128"/>
                 <a:ea typeface="BIZ UDPゴシック" panose="020B0400000000000000" pitchFamily="50" charset="-128"/>
               </a:rPr>
-              <a:t>また、絵パネルから次の電車までの時間も確認しましょう！</a:t>
+              <a:t>また、パネルから次の電車までの時間も確認しましょう！</a:t>
             </a:r>
             <a:endParaRPr dirty="0">
               <a:latin typeface="BIZ UDPゴシック" panose="020B0400000000000000" pitchFamily="50" charset="-128"/>
@@ -3631,6 +3666,68 @@
           </a:p>
         </p:txBody>
       </p:sp>
+      <p:pic>
+        <p:nvPicPr>
+          <p:cNvPr id="7" name="図 6">
+            <a:extLst>
+              <a:ext uri="{FF2B5EF4-FFF2-40B4-BE49-F238E27FC236}">
+                <a16:creationId xmlns:a16="http://schemas.microsoft.com/office/drawing/2014/main" id="{7534DFF3-6E97-1C58-5A6E-BE110D6CDE25}"/>
+              </a:ext>
+            </a:extLst>
+          </p:cNvPr>
+          <p:cNvPicPr>
+            <a:picLocks noChangeAspect="1"/>
+          </p:cNvPicPr>
+          <p:nvPr/>
+        </p:nvPicPr>
+        <p:blipFill>
+          <a:blip r:embed="rId3"/>
+          <a:srcRect t="10566"/>
+          <a:stretch>
+            <a:fillRect/>
+          </a:stretch>
+        </p:blipFill>
+        <p:spPr>
+          <a:xfrm>
+            <a:off x="792480" y="1959935"/>
+            <a:ext cx="1831377" cy="2913157"/>
+          </a:xfrm>
+          <a:prstGeom prst="rect">
+            <a:avLst/>
+          </a:prstGeom>
+        </p:spPr>
+      </p:pic>
+      <p:pic>
+        <p:nvPicPr>
+          <p:cNvPr id="10" name="図 9">
+            <a:extLst>
+              <a:ext uri="{FF2B5EF4-FFF2-40B4-BE49-F238E27FC236}">
+                <a16:creationId xmlns:a16="http://schemas.microsoft.com/office/drawing/2014/main" id="{F65F5400-6CEC-C70C-55DB-7DA099FFD4B6}"/>
+              </a:ext>
+            </a:extLst>
+          </p:cNvPr>
+          <p:cNvPicPr>
+            <a:picLocks noChangeAspect="1"/>
+          </p:cNvPicPr>
+          <p:nvPr/>
+        </p:nvPicPr>
+        <p:blipFill>
+          <a:blip r:embed="rId4"/>
+          <a:srcRect t="7120"/>
+          <a:stretch>
+            <a:fillRect/>
+          </a:stretch>
+        </p:blipFill>
+        <p:spPr>
+          <a:xfrm>
+            <a:off x="683811" y="5066891"/>
+            <a:ext cx="2033158" cy="2908662"/>
+          </a:xfrm>
+          <a:prstGeom prst="rect">
+            <a:avLst/>
+          </a:prstGeom>
+        </p:spPr>
+      </p:pic>
     </p:spTree>
   </p:cSld>
   <p:clrMapOvr>
